--- a/docs/StefaNP_design.pptx
+++ b/docs/StefaNP_design.pptx
@@ -21,6 +21,7 @@
     <p:sldId id="269" r:id="rId20"/>
     <p:sldId id="270" r:id="rId21"/>
     <p:sldId id="271" r:id="rId22"/>
+    <p:sldId id="272" r:id="rId23"/>
   </p:sldIdLst>
   <p:sldSz cx="12191695" cy="6858000" type="screen4x3"/>
   <p:notesSz cx="6858000" cy="9144000"/>
@@ -16632,6 +16633,2200 @@
 </p:sld>
 </file>
 
+<file path=ppt/slides/slide17.xml><?xml version="1.0" encoding="utf-8"?>
+<p:sld xmlns:a="http://schemas.openxmlformats.org/drawingml/2006/main" xmlns:p="http://schemas.openxmlformats.org/presentationml/2006/main" xmlns:r="http://schemas.openxmlformats.org/officeDocument/2006/relationships">
+  <p:cSld>
+    <p:spTree>
+      <p:nvGrpSpPr>
+        <p:cNvPr id="1" name=""/>
+        <p:cNvGrpSpPr/>
+        <p:nvPr/>
+      </p:nvGrpSpPr>
+      <p:grpSpPr/>
+      <p:sp>
+        <p:nvSpPr>
+          <p:cNvPr id="2" name="Rectangle 1"/>
+          <p:cNvSpPr/>
+          <p:nvPr/>
+        </p:nvSpPr>
+        <p:spPr>
+          <a:xfrm>
+            <a:off x="0" y="0"/>
+            <a:ext cx="12191695" cy="54864"/>
+          </a:xfrm>
+          <a:prstGeom prst="rect">
+            <a:avLst/>
+          </a:prstGeom>
+          <a:solidFill>
+            <a:srgbClr val="0B5F8A"/>
+          </a:solidFill>
+          <a:ln>
+            <a:noFill/>
+          </a:ln>
+          <a:effectLst/>
+        </p:spPr>
+        <p:style>
+          <a:lnRef idx="1">
+            <a:schemeClr val="accent1"/>
+          </a:lnRef>
+          <a:fillRef idx="3">
+            <a:schemeClr val="accent1"/>
+          </a:fillRef>
+          <a:effectRef idx="2">
+            <a:schemeClr val="accent1"/>
+          </a:effectRef>
+          <a:fontRef idx="minor">
+            <a:schemeClr val="lt1"/>
+          </a:fontRef>
+        </p:style>
+        <p:txBody>
+          <a:bodyPr rtlCol="0" anchor="ctr"/>
+          <a:lstStyle/>
+          <a:p/>
+        </p:txBody>
+      </p:sp>
+      <p:sp>
+        <p:nvSpPr>
+          <p:cNvPr id="3" name="TextBox 2"/>
+          <p:cNvSpPr txBox="1"/>
+          <p:nvPr/>
+        </p:nvSpPr>
+        <p:spPr>
+          <a:xfrm>
+            <a:off x="457200" y="201168"/>
+            <a:ext cx="11338560" cy="457200"/>
+          </a:xfrm>
+          <a:prstGeom prst="rect">
+            <a:avLst/>
+          </a:prstGeom>
+          <a:noFill/>
+        </p:spPr>
+        <p:txBody>
+          <a:bodyPr wrap="square">
+            <a:spAutoFit/>
+          </a:bodyPr>
+          <a:lstStyle/>
+          <a:p>
+            <a:pPr algn="l">
+              <a:spcAft>
+                <a:spcPts val="400"/>
+              </a:spcAft>
+            </a:pPr>
+            <a:r>
+              <a:rPr sz="2600" b="1" i="0">
+                <a:solidFill>
+                  <a:srgbClr val="1A1A1A"/>
+                </a:solidFill>
+                <a:latin typeface="Calibri"/>
+              </a:rPr>
+              <a:t>Design decisions forced by measurement (2026-08-24)</a:t>
+            </a:r>
+          </a:p>
+        </p:txBody>
+      </p:sp>
+      <p:sp>
+        <p:nvSpPr>
+          <p:cNvPr id="4" name="TextBox 3"/>
+          <p:cNvSpPr txBox="1"/>
+          <p:nvPr/>
+        </p:nvSpPr>
+        <p:spPr>
+          <a:xfrm>
+            <a:off x="457200" y="713232"/>
+            <a:ext cx="11338560" cy="365760"/>
+          </a:xfrm>
+          <a:prstGeom prst="rect">
+            <a:avLst/>
+          </a:prstGeom>
+          <a:noFill/>
+        </p:spPr>
+        <p:txBody>
+          <a:bodyPr wrap="square">
+            <a:spAutoFit/>
+          </a:bodyPr>
+          <a:lstStyle/>
+          <a:p>
+            <a:pPr algn="l">
+              <a:spcAft>
+                <a:spcPts val="400"/>
+              </a:spcAft>
+            </a:pPr>
+            <a:r>
+              <a:rPr sz="1300" b="0" i="0">
+                <a:solidFill>
+                  <a:srgbClr val="5A5F66"/>
+                </a:solidFill>
+                <a:latin typeface="Calibri"/>
+              </a:rPr>
+              <a:t>Each was found by an experiment contradicting the design, not by reasoning about it</a:t>
+            </a:r>
+          </a:p>
+        </p:txBody>
+      </p:sp>
+      <p:sp>
+        <p:nvSpPr>
+          <p:cNvPr id="5" name="Rectangle 4"/>
+          <p:cNvSpPr/>
+          <p:nvPr/>
+        </p:nvSpPr>
+        <p:spPr>
+          <a:xfrm>
+            <a:off x="457200" y="1143000"/>
+            <a:ext cx="3108960" cy="566928"/>
+          </a:xfrm>
+          <a:prstGeom prst="rect">
+            <a:avLst/>
+          </a:prstGeom>
+          <a:solidFill>
+            <a:srgbClr val="0B5F8A"/>
+          </a:solidFill>
+          <a:ln>
+            <a:noFill/>
+          </a:ln>
+          <a:effectLst/>
+        </p:spPr>
+        <p:style>
+          <a:lnRef idx="1">
+            <a:schemeClr val="accent1"/>
+          </a:lnRef>
+          <a:fillRef idx="3">
+            <a:schemeClr val="accent1"/>
+          </a:fillRef>
+          <a:effectRef idx="2">
+            <a:schemeClr val="accent1"/>
+          </a:effectRef>
+          <a:fontRef idx="minor">
+            <a:schemeClr val="lt1"/>
+          </a:fontRef>
+        </p:style>
+        <p:txBody>
+          <a:bodyPr rtlCol="0" anchor="ctr"/>
+          <a:lstStyle/>
+          <a:p/>
+        </p:txBody>
+      </p:sp>
+      <p:sp>
+        <p:nvSpPr>
+          <p:cNvPr id="6" name="TextBox 5"/>
+          <p:cNvSpPr txBox="1"/>
+          <p:nvPr/>
+        </p:nvSpPr>
+        <p:spPr>
+          <a:xfrm>
+            <a:off x="512064" y="1170432"/>
+            <a:ext cx="2999232" cy="566928"/>
+          </a:xfrm>
+          <a:prstGeom prst="rect">
+            <a:avLst/>
+          </a:prstGeom>
+          <a:noFill/>
+        </p:spPr>
+        <p:txBody>
+          <a:bodyPr wrap="square">
+            <a:spAutoFit/>
+          </a:bodyPr>
+          <a:lstStyle/>
+          <a:p>
+            <a:pPr algn="l">
+              <a:spcAft>
+                <a:spcPts val="400"/>
+              </a:spcAft>
+            </a:pPr>
+            <a:r>
+              <a:rPr sz="950" b="1" i="0">
+                <a:solidFill>
+                  <a:srgbClr val="FFFFFF"/>
+                </a:solidFill>
+                <a:latin typeface="Calibri"/>
+              </a:rPr>
+              <a:t>decision</a:t>
+            </a:r>
+          </a:p>
+        </p:txBody>
+      </p:sp>
+      <p:sp>
+        <p:nvSpPr>
+          <p:cNvPr id="7" name="Rectangle 6"/>
+          <p:cNvSpPr/>
+          <p:nvPr/>
+        </p:nvSpPr>
+        <p:spPr>
+          <a:xfrm>
+            <a:off x="3566160" y="1143000"/>
+            <a:ext cx="4114800" cy="566928"/>
+          </a:xfrm>
+          <a:prstGeom prst="rect">
+            <a:avLst/>
+          </a:prstGeom>
+          <a:solidFill>
+            <a:srgbClr val="0B5F8A"/>
+          </a:solidFill>
+          <a:ln>
+            <a:noFill/>
+          </a:ln>
+          <a:effectLst/>
+        </p:spPr>
+        <p:style>
+          <a:lnRef idx="1">
+            <a:schemeClr val="accent1"/>
+          </a:lnRef>
+          <a:fillRef idx="3">
+            <a:schemeClr val="accent1"/>
+          </a:fillRef>
+          <a:effectRef idx="2">
+            <a:schemeClr val="accent1"/>
+          </a:effectRef>
+          <a:fontRef idx="minor">
+            <a:schemeClr val="lt1"/>
+          </a:fontRef>
+        </p:style>
+        <p:txBody>
+          <a:bodyPr rtlCol="0" anchor="ctr"/>
+          <a:lstStyle/>
+          <a:p/>
+        </p:txBody>
+      </p:sp>
+      <p:sp>
+        <p:nvSpPr>
+          <p:cNvPr id="8" name="TextBox 7"/>
+          <p:cNvSpPr txBox="1"/>
+          <p:nvPr/>
+        </p:nvSpPr>
+        <p:spPr>
+          <a:xfrm>
+            <a:off x="3621024" y="1170432"/>
+            <a:ext cx="4005072" cy="566928"/>
+          </a:xfrm>
+          <a:prstGeom prst="rect">
+            <a:avLst/>
+          </a:prstGeom>
+          <a:noFill/>
+        </p:spPr>
+        <p:txBody>
+          <a:bodyPr wrap="square">
+            <a:spAutoFit/>
+          </a:bodyPr>
+          <a:lstStyle/>
+          <a:p>
+            <a:pPr algn="l">
+              <a:spcAft>
+                <a:spcPts val="400"/>
+              </a:spcAft>
+            </a:pPr>
+            <a:r>
+              <a:rPr sz="950" b="1" i="0">
+                <a:solidFill>
+                  <a:srgbClr val="FFFFFF"/>
+                </a:solidFill>
+                <a:latin typeface="Calibri"/>
+              </a:rPr>
+              <a:t>why</a:t>
+            </a:r>
+          </a:p>
+        </p:txBody>
+      </p:sp>
+      <p:sp>
+        <p:nvSpPr>
+          <p:cNvPr id="9" name="Rectangle 8"/>
+          <p:cNvSpPr/>
+          <p:nvPr/>
+        </p:nvSpPr>
+        <p:spPr>
+          <a:xfrm>
+            <a:off x="7680960" y="1143000"/>
+            <a:ext cx="4023360" cy="566928"/>
+          </a:xfrm>
+          <a:prstGeom prst="rect">
+            <a:avLst/>
+          </a:prstGeom>
+          <a:solidFill>
+            <a:srgbClr val="0B5F8A"/>
+          </a:solidFill>
+          <a:ln>
+            <a:noFill/>
+          </a:ln>
+          <a:effectLst/>
+        </p:spPr>
+        <p:style>
+          <a:lnRef idx="1">
+            <a:schemeClr val="accent1"/>
+          </a:lnRef>
+          <a:fillRef idx="3">
+            <a:schemeClr val="accent1"/>
+          </a:fillRef>
+          <a:effectRef idx="2">
+            <a:schemeClr val="accent1"/>
+          </a:effectRef>
+          <a:fontRef idx="minor">
+            <a:schemeClr val="lt1"/>
+          </a:fontRef>
+        </p:style>
+        <p:txBody>
+          <a:bodyPr rtlCol="0" anchor="ctr"/>
+          <a:lstStyle/>
+          <a:p/>
+        </p:txBody>
+      </p:sp>
+      <p:sp>
+        <p:nvSpPr>
+          <p:cNvPr id="10" name="TextBox 9"/>
+          <p:cNvSpPr txBox="1"/>
+          <p:nvPr/>
+        </p:nvSpPr>
+        <p:spPr>
+          <a:xfrm>
+            <a:off x="7735824" y="1170432"/>
+            <a:ext cx="3913632" cy="566928"/>
+          </a:xfrm>
+          <a:prstGeom prst="rect">
+            <a:avLst/>
+          </a:prstGeom>
+          <a:noFill/>
+        </p:spPr>
+        <p:txBody>
+          <a:bodyPr wrap="square">
+            <a:spAutoFit/>
+          </a:bodyPr>
+          <a:lstStyle/>
+          <a:p>
+            <a:pPr algn="l">
+              <a:spcAft>
+                <a:spcPts val="400"/>
+              </a:spcAft>
+            </a:pPr>
+            <a:r>
+              <a:rPr sz="950" b="1" i="0">
+                <a:solidFill>
+                  <a:srgbClr val="FFFFFF"/>
+                </a:solidFill>
+                <a:latin typeface="Calibri"/>
+              </a:rPr>
+              <a:t>evidence</a:t>
+            </a:r>
+          </a:p>
+        </p:txBody>
+      </p:sp>
+      <p:sp>
+        <p:nvSpPr>
+          <p:cNvPr id="11" name="Rectangle 10"/>
+          <p:cNvSpPr/>
+          <p:nvPr/>
+        </p:nvSpPr>
+        <p:spPr>
+          <a:xfrm>
+            <a:off x="457200" y="1709928"/>
+            <a:ext cx="3108960" cy="566928"/>
+          </a:xfrm>
+          <a:prstGeom prst="rect">
+            <a:avLst/>
+          </a:prstGeom>
+          <a:solidFill>
+            <a:srgbClr val="F4F6F8"/>
+          </a:solidFill>
+          <a:ln>
+            <a:noFill/>
+          </a:ln>
+          <a:effectLst/>
+        </p:spPr>
+        <p:style>
+          <a:lnRef idx="1">
+            <a:schemeClr val="accent1"/>
+          </a:lnRef>
+          <a:fillRef idx="3">
+            <a:schemeClr val="accent1"/>
+          </a:fillRef>
+          <a:effectRef idx="2">
+            <a:schemeClr val="accent1"/>
+          </a:effectRef>
+          <a:fontRef idx="minor">
+            <a:schemeClr val="lt1"/>
+          </a:fontRef>
+        </p:style>
+        <p:txBody>
+          <a:bodyPr rtlCol="0" anchor="ctr"/>
+          <a:lstStyle/>
+          <a:p/>
+        </p:txBody>
+      </p:sp>
+      <p:sp>
+        <p:nvSpPr>
+          <p:cNvPr id="12" name="TextBox 11"/>
+          <p:cNvSpPr txBox="1"/>
+          <p:nvPr/>
+        </p:nvSpPr>
+        <p:spPr>
+          <a:xfrm>
+            <a:off x="512064" y="1737360"/>
+            <a:ext cx="2999232" cy="566928"/>
+          </a:xfrm>
+          <a:prstGeom prst="rect">
+            <a:avLst/>
+          </a:prstGeom>
+          <a:noFill/>
+        </p:spPr>
+        <p:txBody>
+          <a:bodyPr wrap="square">
+            <a:spAutoFit/>
+          </a:bodyPr>
+          <a:lstStyle/>
+          <a:p>
+            <a:pPr algn="l">
+              <a:spcAft>
+                <a:spcPts val="400"/>
+              </a:spcAft>
+            </a:pPr>
+            <a:r>
+              <a:rPr sz="950" b="0" i="0">
+                <a:solidFill>
+                  <a:srgbClr val="1A1A1A"/>
+                </a:solidFill>
+                <a:latin typeface="Calibri"/>
+              </a:rPr>
+              <a:t>Attributes: ONE TOKEN EACH, ID-addressed</a:t>
+            </a:r>
+          </a:p>
+          <a:p>
+            <a:pPr algn="l">
+              <a:spcAft>
+                <a:spcPts val="400"/>
+              </a:spcAft>
+            </a:pPr>
+            <a:r>
+              <a:rPr sz="950" b="0" i="0">
+                <a:solidFill>
+                  <a:srgbClr val="1A1A1A"/>
+                </a:solidFill>
+                <a:latin typeface="Calibri"/>
+              </a:rPr>
+              <a:t>(was: all 26 through one MLP)</a:t>
+            </a:r>
+          </a:p>
+        </p:txBody>
+      </p:sp>
+      <p:sp>
+        <p:nvSpPr>
+          <p:cNvPr id="13" name="Rectangle 12"/>
+          <p:cNvSpPr/>
+          <p:nvPr/>
+        </p:nvSpPr>
+        <p:spPr>
+          <a:xfrm>
+            <a:off x="3566160" y="1709928"/>
+            <a:ext cx="4114800" cy="566928"/>
+          </a:xfrm>
+          <a:prstGeom prst="rect">
+            <a:avLst/>
+          </a:prstGeom>
+          <a:solidFill>
+            <a:srgbClr val="F4F6F8"/>
+          </a:solidFill>
+          <a:ln>
+            <a:noFill/>
+          </a:ln>
+          <a:effectLst/>
+        </p:spPr>
+        <p:style>
+          <a:lnRef idx="1">
+            <a:schemeClr val="accent1"/>
+          </a:lnRef>
+          <a:fillRef idx="3">
+            <a:schemeClr val="accent1"/>
+          </a:fillRef>
+          <a:effectRef idx="2">
+            <a:schemeClr val="accent1"/>
+          </a:effectRef>
+          <a:fontRef idx="minor">
+            <a:schemeClr val="lt1"/>
+          </a:fontRef>
+        </p:style>
+        <p:txBody>
+          <a:bodyPr rtlCol="0" anchor="ctr"/>
+          <a:lstStyle/>
+          <a:p/>
+        </p:txBody>
+      </p:sp>
+      <p:sp>
+        <p:nvSpPr>
+          <p:cNvPr id="14" name="TextBox 13"/>
+          <p:cNvSpPr txBox="1"/>
+          <p:nvPr/>
+        </p:nvSpPr>
+        <p:spPr>
+          <a:xfrm>
+            <a:off x="3621024" y="1737360"/>
+            <a:ext cx="4005072" cy="566928"/>
+          </a:xfrm>
+          <a:prstGeom prst="rect">
+            <a:avLst/>
+          </a:prstGeom>
+          <a:noFill/>
+        </p:spPr>
+        <p:txBody>
+          <a:bodyPr wrap="square">
+            <a:spAutoFit/>
+          </a:bodyPr>
+          <a:lstStyle/>
+          <a:p>
+            <a:pPr algn="l">
+              <a:spcAft>
+                <a:spcPts val="400"/>
+              </a:spcAft>
+            </a:pPr>
+            <a:r>
+              <a:rPr sz="950" b="0" i="0">
+                <a:solidFill>
+                  <a:srgbClr val="1A1A1A"/>
+                </a:solidFill>
+                <a:latin typeface="Calibri"/>
+              </a:rPr>
+              <a:t>extensible to new attributes; missing becomes an</a:t>
+            </a:r>
+          </a:p>
+          <a:p>
+            <a:pPr algn="l">
+              <a:spcAft>
+                <a:spcPts val="400"/>
+              </a:spcAft>
+            </a:pPr>
+            <a:r>
+              <a:rPr sz="950" b="0" i="0">
+                <a:solidFill>
+                  <a:srgbClr val="1A1A1A"/>
+                </a:solidFill>
+                <a:latin typeface="Calibri"/>
+              </a:rPr>
+              <a:t>ABSENT TOKEN, not a zero; individually maskable</a:t>
+            </a:r>
+          </a:p>
+        </p:txBody>
+      </p:sp>
+      <p:sp>
+        <p:nvSpPr>
+          <p:cNvPr id="15" name="Rectangle 14"/>
+          <p:cNvSpPr/>
+          <p:nvPr/>
+        </p:nvSpPr>
+        <p:spPr>
+          <a:xfrm>
+            <a:off x="7680960" y="1709928"/>
+            <a:ext cx="4023360" cy="566928"/>
+          </a:xfrm>
+          <a:prstGeom prst="rect">
+            <a:avLst/>
+          </a:prstGeom>
+          <a:solidFill>
+            <a:srgbClr val="F4F6F8"/>
+          </a:solidFill>
+          <a:ln>
+            <a:noFill/>
+          </a:ln>
+          <a:effectLst/>
+        </p:spPr>
+        <p:style>
+          <a:lnRef idx="1">
+            <a:schemeClr val="accent1"/>
+          </a:lnRef>
+          <a:fillRef idx="3">
+            <a:schemeClr val="accent1"/>
+          </a:fillRef>
+          <a:effectRef idx="2">
+            <a:schemeClr val="accent1"/>
+          </a:effectRef>
+          <a:fontRef idx="minor">
+            <a:schemeClr val="lt1"/>
+          </a:fontRef>
+        </p:style>
+        <p:txBody>
+          <a:bodyPr rtlCol="0" anchor="ctr"/>
+          <a:lstStyle/>
+          <a:p/>
+        </p:txBody>
+      </p:sp>
+      <p:sp>
+        <p:nvSpPr>
+          <p:cNvPr id="16" name="TextBox 15"/>
+          <p:cNvSpPr txBox="1"/>
+          <p:nvPr/>
+        </p:nvSpPr>
+        <p:spPr>
+          <a:xfrm>
+            <a:off x="7735824" y="1737360"/>
+            <a:ext cx="3913632" cy="566928"/>
+          </a:xfrm>
+          <a:prstGeom prst="rect">
+            <a:avLst/>
+          </a:prstGeom>
+          <a:noFill/>
+        </p:spPr>
+        <p:txBody>
+          <a:bodyPr wrap="square">
+            <a:spAutoFit/>
+          </a:bodyPr>
+          <a:lstStyle/>
+          <a:p>
+            <a:pPr algn="l">
+              <a:spcAft>
+                <a:spcPts val="400"/>
+              </a:spcAft>
+            </a:pPr>
+            <a:r>
+              <a:rPr sz="950" b="0" i="0">
+                <a:solidFill>
+                  <a:srgbClr val="1B7F4B"/>
+                </a:solidFill>
+                <a:latin typeface="Calibri"/>
+              </a:rPr>
+              <a:t>+13% tokens (196 -&gt; 222). Global statics will be</a:t>
+            </a:r>
+          </a:p>
+          <a:p>
+            <a:pPr algn="l">
+              <a:spcAft>
+                <a:spcPts val="400"/>
+              </a:spcAft>
+            </a:pPr>
+            <a:r>
+              <a:rPr sz="950" b="0" i="0">
+                <a:solidFill>
+                  <a:srgbClr val="1B7F4B"/>
+                </a:solidFill>
+                <a:latin typeface="Calibri"/>
+              </a:rPr>
+              <a:t>sparse and noisy, so absent must be first-class</a:t>
+            </a:r>
+          </a:p>
+        </p:txBody>
+      </p:sp>
+      <p:sp>
+        <p:nvSpPr>
+          <p:cNvPr id="17" name="Rectangle 16"/>
+          <p:cNvSpPr/>
+          <p:nvPr/>
+        </p:nvSpPr>
+        <p:spPr>
+          <a:xfrm>
+            <a:off x="457200" y="2276856"/>
+            <a:ext cx="3108960" cy="566928"/>
+          </a:xfrm>
+          <a:prstGeom prst="rect">
+            <a:avLst/>
+          </a:prstGeom>
+          <a:solidFill>
+            <a:srgbClr val="FFFFFF"/>
+          </a:solidFill>
+          <a:ln>
+            <a:noFill/>
+          </a:ln>
+          <a:effectLst/>
+        </p:spPr>
+        <p:style>
+          <a:lnRef idx="1">
+            <a:schemeClr val="accent1"/>
+          </a:lnRef>
+          <a:fillRef idx="3">
+            <a:schemeClr val="accent1"/>
+          </a:fillRef>
+          <a:effectRef idx="2">
+            <a:schemeClr val="accent1"/>
+          </a:effectRef>
+          <a:fontRef idx="minor">
+            <a:schemeClr val="lt1"/>
+          </a:fontRef>
+        </p:style>
+        <p:txBody>
+          <a:bodyPr rtlCol="0" anchor="ctr"/>
+          <a:lstStyle/>
+          <a:p/>
+        </p:txBody>
+      </p:sp>
+      <p:sp>
+        <p:nvSpPr>
+          <p:cNvPr id="18" name="TextBox 17"/>
+          <p:cNvSpPr txBox="1"/>
+          <p:nvPr/>
+        </p:nvSpPr>
+        <p:spPr>
+          <a:xfrm>
+            <a:off x="512064" y="2304288"/>
+            <a:ext cx="2999232" cy="566928"/>
+          </a:xfrm>
+          <a:prstGeom prst="rect">
+            <a:avLst/>
+          </a:prstGeom>
+          <a:noFill/>
+        </p:spPr>
+        <p:txBody>
+          <a:bodyPr wrap="square">
+            <a:spAutoFit/>
+          </a:bodyPr>
+          <a:lstStyle/>
+          <a:p>
+            <a:pPr algn="l">
+              <a:spcAft>
+                <a:spcPts val="400"/>
+              </a:spcAft>
+            </a:pPr>
+            <a:r>
+              <a:rPr sz="950" b="0" i="0">
+                <a:solidFill>
+                  <a:srgbClr val="1A1A1A"/>
+                </a:solidFill>
+                <a:latin typeface="Calibri"/>
+              </a:rPr>
+              <a:t>The TASK DISTRIBUTION is the product,</a:t>
+            </a:r>
+          </a:p>
+          <a:p>
+            <a:pPr algn="l">
+              <a:spcAft>
+                <a:spcPts val="400"/>
+              </a:spcAft>
+            </a:pPr>
+            <a:r>
+              <a:rPr sz="950" b="0" i="0">
+                <a:solidFill>
+                  <a:srgbClr val="1A1A1A"/>
+                </a:solidFill>
+                <a:latin typeface="Calibri"/>
+              </a:rPr>
+              <a:t>not an implementation detail</a:t>
+            </a:r>
+          </a:p>
+        </p:txBody>
+      </p:sp>
+      <p:sp>
+        <p:nvSpPr>
+          <p:cNvPr id="19" name="Rectangle 18"/>
+          <p:cNvSpPr/>
+          <p:nvPr/>
+        </p:nvSpPr>
+        <p:spPr>
+          <a:xfrm>
+            <a:off x="3566160" y="2276856"/>
+            <a:ext cx="4114800" cy="566928"/>
+          </a:xfrm>
+          <a:prstGeom prst="rect">
+            <a:avLst/>
+          </a:prstGeom>
+          <a:solidFill>
+            <a:srgbClr val="FFFFFF"/>
+          </a:solidFill>
+          <a:ln>
+            <a:noFill/>
+          </a:ln>
+          <a:effectLst/>
+        </p:spPr>
+        <p:style>
+          <a:lnRef idx="1">
+            <a:schemeClr val="accent1"/>
+          </a:lnRef>
+          <a:fillRef idx="3">
+            <a:schemeClr val="accent1"/>
+          </a:fillRef>
+          <a:effectRef idx="2">
+            <a:schemeClr val="accent1"/>
+          </a:effectRef>
+          <a:fontRef idx="minor">
+            <a:schemeClr val="lt1"/>
+          </a:fontRef>
+        </p:style>
+        <p:txBody>
+          <a:bodyPr rtlCol="0" anchor="ctr"/>
+          <a:lstStyle/>
+          <a:p/>
+        </p:txBody>
+      </p:sp>
+      <p:sp>
+        <p:nvSpPr>
+          <p:cNvPr id="20" name="TextBox 19"/>
+          <p:cNvSpPr txBox="1"/>
+          <p:nvPr/>
+        </p:nvSpPr>
+        <p:spPr>
+          <a:xfrm>
+            <a:off x="3621024" y="2304288"/>
+            <a:ext cx="4005072" cy="566928"/>
+          </a:xfrm>
+          <a:prstGeom prst="rect">
+            <a:avLst/>
+          </a:prstGeom>
+          <a:noFill/>
+        </p:spPr>
+        <p:txBody>
+          <a:bodyPr wrap="square">
+            <a:spAutoFit/>
+          </a:bodyPr>
+          <a:lstStyle/>
+          <a:p>
+            <a:pPr algn="l">
+              <a:spcAft>
+                <a:spcPts val="400"/>
+              </a:spcAft>
+            </a:pPr>
+            <a:r>
+              <a:rPr sz="950" b="0" i="0">
+                <a:solidFill>
+                  <a:srgbClr val="1A1A1A"/>
+                </a:solidFill>
+                <a:latin typeface="Calibri"/>
+              </a:rPr>
+              <a:t>in-context learning works over DATA (unseen</a:t>
+            </a:r>
+          </a:p>
+          <a:p>
+            <a:pPr algn="l">
+              <a:spcAft>
+                <a:spcPts val="400"/>
+              </a:spcAft>
+            </a:pPr>
+            <a:r>
+              <a:rPr sz="950" b="0" i="0">
+                <a:solidFill>
+                  <a:srgbClr val="1A1A1A"/>
+                </a:solidFill>
+                <a:latin typeface="Calibri"/>
+              </a:rPr>
+              <a:t>basins) but NOT over TASKS</a:t>
+            </a:r>
+          </a:p>
+        </p:txBody>
+      </p:sp>
+      <p:sp>
+        <p:nvSpPr>
+          <p:cNvPr id="21" name="Rectangle 20"/>
+          <p:cNvSpPr/>
+          <p:nvPr/>
+        </p:nvSpPr>
+        <p:spPr>
+          <a:xfrm>
+            <a:off x="7680960" y="2276856"/>
+            <a:ext cx="4023360" cy="566928"/>
+          </a:xfrm>
+          <a:prstGeom prst="rect">
+            <a:avLst/>
+          </a:prstGeom>
+          <a:solidFill>
+            <a:srgbClr val="FFFFFF"/>
+          </a:solidFill>
+          <a:ln>
+            <a:noFill/>
+          </a:ln>
+          <a:effectLst/>
+        </p:spPr>
+        <p:style>
+          <a:lnRef idx="1">
+            <a:schemeClr val="accent1"/>
+          </a:lnRef>
+          <a:fillRef idx="3">
+            <a:schemeClr val="accent1"/>
+          </a:fillRef>
+          <a:effectRef idx="2">
+            <a:schemeClr val="accent1"/>
+          </a:effectRef>
+          <a:fontRef idx="minor">
+            <a:schemeClr val="lt1"/>
+          </a:fontRef>
+        </p:style>
+        <p:txBody>
+          <a:bodyPr rtlCol="0" anchor="ctr"/>
+          <a:lstStyle/>
+          <a:p/>
+        </p:txBody>
+      </p:sp>
+      <p:sp>
+        <p:nvSpPr>
+          <p:cNvPr id="22" name="TextBox 21"/>
+          <p:cNvSpPr txBox="1"/>
+          <p:nvPr/>
+        </p:nvSpPr>
+        <p:spPr>
+          <a:xfrm>
+            <a:off x="7735824" y="2304288"/>
+            <a:ext cx="3913632" cy="566928"/>
+          </a:xfrm>
+          <a:prstGeom prst="rect">
+            <a:avLst/>
+          </a:prstGeom>
+          <a:noFill/>
+        </p:spPr>
+        <p:txBody>
+          <a:bodyPr wrap="square">
+            <a:spAutoFit/>
+          </a:bodyPr>
+          <a:lstStyle/>
+          <a:p>
+            <a:pPr algn="l">
+              <a:spcAft>
+                <a:spcPts val="400"/>
+              </a:spcAft>
+            </a:pPr>
+            <a:r>
+              <a:rPr sz="950" b="0" i="0">
+                <a:solidFill>
+                  <a:srgbClr val="1A1A1A"/>
+                </a:solidFill>
+                <a:latin typeface="Calibri"/>
+              </a:rPr>
+              <a:t>self-as-context zero-shot 0.249 vs 0.698 control;</a:t>
+            </a:r>
+          </a:p>
+          <a:p>
+            <a:pPr algn="l">
+              <a:spcAft>
+                <a:spcPts val="400"/>
+              </a:spcAft>
+            </a:pPr>
+            <a:r>
+              <a:rPr sz="950" b="0" i="0">
+                <a:solidFill>
+                  <a:srgbClr val="1A1A1A"/>
+                </a:solidFill>
+                <a:latin typeface="Calibri"/>
+              </a:rPr>
+              <a:t>tcross stays at random init if never exercised</a:t>
+            </a:r>
+          </a:p>
+        </p:txBody>
+      </p:sp>
+      <p:sp>
+        <p:nvSpPr>
+          <p:cNvPr id="23" name="Rectangle 22"/>
+          <p:cNvSpPr/>
+          <p:nvPr/>
+        </p:nvSpPr>
+        <p:spPr>
+          <a:xfrm>
+            <a:off x="457200" y="2843784"/>
+            <a:ext cx="3108960" cy="566928"/>
+          </a:xfrm>
+          <a:prstGeom prst="rect">
+            <a:avLst/>
+          </a:prstGeom>
+          <a:solidFill>
+            <a:srgbClr val="F4F6F8"/>
+          </a:solidFill>
+          <a:ln>
+            <a:noFill/>
+          </a:ln>
+          <a:effectLst/>
+        </p:spPr>
+        <p:style>
+          <a:lnRef idx="1">
+            <a:schemeClr val="accent1"/>
+          </a:lnRef>
+          <a:fillRef idx="3">
+            <a:schemeClr val="accent1"/>
+          </a:fillRef>
+          <a:effectRef idx="2">
+            <a:schemeClr val="accent1"/>
+          </a:effectRef>
+          <a:fontRef idx="minor">
+            <a:schemeClr val="lt1"/>
+          </a:fontRef>
+        </p:style>
+        <p:txBody>
+          <a:bodyPr rtlCol="0" anchor="ctr"/>
+          <a:lstStyle/>
+          <a:p/>
+        </p:txBody>
+      </p:sp>
+      <p:sp>
+        <p:nvSpPr>
+          <p:cNvPr id="24" name="TextBox 23"/>
+          <p:cNvSpPr txBox="1"/>
+          <p:nvPr/>
+        </p:nvSpPr>
+        <p:spPr>
+          <a:xfrm>
+            <a:off x="512064" y="2871216"/>
+            <a:ext cx="2999232" cy="566928"/>
+          </a:xfrm>
+          <a:prstGeom prst="rect">
+            <a:avLst/>
+          </a:prstGeom>
+          <a:noFill/>
+        </p:spPr>
+        <p:txBody>
+          <a:bodyPr wrap="square">
+            <a:spAutoFit/>
+          </a:bodyPr>
+          <a:lstStyle/>
+          <a:p>
+            <a:pPr algn="l">
+              <a:spcAft>
+                <a:spcPts val="400"/>
+              </a:spcAft>
+            </a:pPr>
+            <a:r>
+              <a:rPr sz="950" b="0" i="0">
+                <a:solidFill>
+                  <a:srgbClr val="1A1A1A"/>
+                </a:solidFill>
+                <a:latin typeface="Calibri"/>
+              </a:rPr>
+              <a:t>Every conditional needs an ADEQUATE</a:t>
+            </a:r>
+          </a:p>
+          <a:p>
+            <a:pPr algn="l">
+              <a:spcAft>
+                <a:spcPts val="400"/>
+              </a:spcAft>
+            </a:pPr>
+            <a:r>
+              <a:rPr sz="950" b="0" i="0">
+                <a:solidFill>
+                  <a:srgbClr val="1A1A1A"/>
+                </a:solidFill>
+                <a:latin typeface="Calibri"/>
+              </a:rPr>
+              <a:t>SHARE of training, not mere presence</a:t>
+            </a:r>
+          </a:p>
+        </p:txBody>
+      </p:sp>
+      <p:sp>
+        <p:nvSpPr>
+          <p:cNvPr id="25" name="Rectangle 24"/>
+          <p:cNvSpPr/>
+          <p:nvPr/>
+        </p:nvSpPr>
+        <p:spPr>
+          <a:xfrm>
+            <a:off x="3566160" y="2843784"/>
+            <a:ext cx="4114800" cy="566928"/>
+          </a:xfrm>
+          <a:prstGeom prst="rect">
+            <a:avLst/>
+          </a:prstGeom>
+          <a:solidFill>
+            <a:srgbClr val="F4F6F8"/>
+          </a:solidFill>
+          <a:ln>
+            <a:noFill/>
+          </a:ln>
+          <a:effectLst/>
+        </p:spPr>
+        <p:style>
+          <a:lnRef idx="1">
+            <a:schemeClr val="accent1"/>
+          </a:lnRef>
+          <a:fillRef idx="3">
+            <a:schemeClr val="accent1"/>
+          </a:fillRef>
+          <a:effectRef idx="2">
+            <a:schemeClr val="accent1"/>
+          </a:effectRef>
+          <a:fontRef idx="minor">
+            <a:schemeClr val="lt1"/>
+          </a:fontRef>
+        </p:style>
+        <p:txBody>
+          <a:bodyPr rtlCol="0" anchor="ctr"/>
+          <a:lstStyle/>
+          <a:p/>
+        </p:txBody>
+      </p:sp>
+      <p:sp>
+        <p:nvSpPr>
+          <p:cNvPr id="26" name="TextBox 25"/>
+          <p:cNvSpPr txBox="1"/>
+          <p:nvPr/>
+        </p:nvSpPr>
+        <p:spPr>
+          <a:xfrm>
+            <a:off x="3621024" y="2871216"/>
+            <a:ext cx="4005072" cy="566928"/>
+          </a:xfrm>
+          <a:prstGeom prst="rect">
+            <a:avLst/>
+          </a:prstGeom>
+          <a:noFill/>
+        </p:spPr>
+        <p:txBody>
+          <a:bodyPr wrap="square">
+            <a:spAutoFit/>
+          </a:bodyPr>
+          <a:lstStyle/>
+          <a:p>
+            <a:pPr algn="l">
+              <a:spcAft>
+                <a:spcPts val="400"/>
+              </a:spcAft>
+            </a:pPr>
+            <a:r>
+              <a:rPr sz="950" b="0" i="0">
+                <a:solidFill>
+                  <a:srgbClr val="1A1A1A"/>
+                </a:solidFill>
+                <a:latin typeface="Calibri"/>
+              </a:rPr>
+              <a:t>a pathway always available gets relied on; one</a:t>
+            </a:r>
+          </a:p>
+          <a:p>
+            <a:pPr algn="l">
+              <a:spcAft>
+                <a:spcPts val="400"/>
+              </a:spcAft>
+            </a:pPr>
+            <a:r>
+              <a:rPr sz="950" b="0" i="0">
+                <a:solidFill>
+                  <a:srgbClr val="1A1A1A"/>
+                </a:solidFill>
+                <a:latin typeface="Calibri"/>
+              </a:rPr>
+              <a:t>that is starved never forms at all</a:t>
+            </a:r>
+          </a:p>
+        </p:txBody>
+      </p:sp>
+      <p:sp>
+        <p:nvSpPr>
+          <p:cNvPr id="27" name="Rectangle 26"/>
+          <p:cNvSpPr/>
+          <p:nvPr/>
+        </p:nvSpPr>
+        <p:spPr>
+          <a:xfrm>
+            <a:off x="7680960" y="2843784"/>
+            <a:ext cx="4023360" cy="566928"/>
+          </a:xfrm>
+          <a:prstGeom prst="rect">
+            <a:avLst/>
+          </a:prstGeom>
+          <a:solidFill>
+            <a:srgbClr val="F4F6F8"/>
+          </a:solidFill>
+          <a:ln>
+            <a:noFill/>
+          </a:ln>
+          <a:effectLst/>
+        </p:spPr>
+        <p:style>
+          <a:lnRef idx="1">
+            <a:schemeClr val="accent1"/>
+          </a:lnRef>
+          <a:fillRef idx="3">
+            <a:schemeClr val="accent1"/>
+          </a:fillRef>
+          <a:effectRef idx="2">
+            <a:schemeClr val="accent1"/>
+          </a:effectRef>
+          <a:fontRef idx="minor">
+            <a:schemeClr val="lt1"/>
+          </a:fontRef>
+        </p:style>
+        <p:txBody>
+          <a:bodyPr rtlCol="0" anchor="ctr"/>
+          <a:lstStyle/>
+          <a:p/>
+        </p:txBody>
+      </p:sp>
+      <p:sp>
+        <p:nvSpPr>
+          <p:cNvPr id="28" name="TextBox 27"/>
+          <p:cNvSpPr txBox="1"/>
+          <p:nvPr/>
+        </p:nvSpPr>
+        <p:spPr>
+          <a:xfrm>
+            <a:off x="7735824" y="2871216"/>
+            <a:ext cx="3913632" cy="566928"/>
+          </a:xfrm>
+          <a:prstGeom prst="rect">
+            <a:avLst/>
+          </a:prstGeom>
+          <a:noFill/>
+        </p:spPr>
+        <p:txBody>
+          <a:bodyPr wrap="square">
+            <a:spAutoFit/>
+          </a:bodyPr>
+          <a:lstStyle/>
+          <a:p>
+            <a:pPr algn="l">
+              <a:spcAft>
+                <a:spcPts val="400"/>
+              </a:spcAft>
+            </a:pPr>
+            <a:r>
+              <a:rPr sz="950" b="0" i="0">
+                <a:solidFill>
+                  <a:srgbClr val="1A1A1A"/>
+                </a:solidFill>
+                <a:latin typeface="Calibri"/>
+              </a:rPr>
+              <a:t>K=0 at 1/6 of tasks: 0.658. K=0-only: 0.7164.</a:t>
+            </a:r>
+          </a:p>
+          <a:p>
+            <a:pPr algn="l">
+              <a:spcAft>
+                <a:spcPts val="400"/>
+              </a:spcAft>
+            </a:pPr>
+            <a:r>
+              <a:rPr sz="950" b="0" i="0">
+                <a:solidFill>
+                  <a:srgbClr val="1A1A1A"/>
+                </a:solidFill>
+                <a:latin typeface="Calibri"/>
+              </a:rPr>
+              <a:t>Same default cost the DA task 0.17</a:t>
+            </a:r>
+          </a:p>
+        </p:txBody>
+      </p:sp>
+      <p:sp>
+        <p:nvSpPr>
+          <p:cNvPr id="29" name="Rectangle 28"/>
+          <p:cNvSpPr/>
+          <p:nvPr/>
+        </p:nvSpPr>
+        <p:spPr>
+          <a:xfrm>
+            <a:off x="457200" y="3410712"/>
+            <a:ext cx="3108960" cy="566928"/>
+          </a:xfrm>
+          <a:prstGeom prst="rect">
+            <a:avLst/>
+          </a:prstGeom>
+          <a:solidFill>
+            <a:srgbClr val="FFFFFF"/>
+          </a:solidFill>
+          <a:ln>
+            <a:noFill/>
+          </a:ln>
+          <a:effectLst/>
+        </p:spPr>
+        <p:style>
+          <a:lnRef idx="1">
+            <a:schemeClr val="accent1"/>
+          </a:lnRef>
+          <a:fillRef idx="3">
+            <a:schemeClr val="accent1"/>
+          </a:fillRef>
+          <a:effectRef idx="2">
+            <a:schemeClr val="accent1"/>
+          </a:effectRef>
+          <a:fontRef idx="minor">
+            <a:schemeClr val="lt1"/>
+          </a:fontRef>
+        </p:style>
+        <p:txBody>
+          <a:bodyPr rtlCol="0" anchor="ctr"/>
+          <a:lstStyle/>
+          <a:p/>
+        </p:txBody>
+      </p:sp>
+      <p:sp>
+        <p:nvSpPr>
+          <p:cNvPr id="30" name="TextBox 29"/>
+          <p:cNvSpPr txBox="1"/>
+          <p:nvPr/>
+        </p:nvSpPr>
+        <p:spPr>
+          <a:xfrm>
+            <a:off x="512064" y="3438144"/>
+            <a:ext cx="2999232" cy="566928"/>
+          </a:xfrm>
+          <a:prstGeom prst="rect">
+            <a:avLst/>
+          </a:prstGeom>
+          <a:noFill/>
+        </p:spPr>
+        <p:txBody>
+          <a:bodyPr wrap="square">
+            <a:spAutoFit/>
+          </a:bodyPr>
+          <a:lstStyle/>
+          <a:p>
+            <a:pPr algn="l">
+              <a:spcAft>
+                <a:spcPts val="400"/>
+              </a:spcAft>
+            </a:pPr>
+            <a:r>
+              <a:rPr sz="950" b="0" i="0">
+                <a:solidFill>
+                  <a:srgbClr val="1A1A1A"/>
+                </a:solidFill>
+                <a:latin typeface="Calibri"/>
+              </a:rPr>
+              <a:t>Causal masking, always</a:t>
+            </a:r>
+          </a:p>
+        </p:txBody>
+      </p:sp>
+      <p:sp>
+        <p:nvSpPr>
+          <p:cNvPr id="31" name="Rectangle 30"/>
+          <p:cNvSpPr/>
+          <p:nvPr/>
+        </p:nvSpPr>
+        <p:spPr>
+          <a:xfrm>
+            <a:off x="3566160" y="3410712"/>
+            <a:ext cx="4114800" cy="566928"/>
+          </a:xfrm>
+          <a:prstGeom prst="rect">
+            <a:avLst/>
+          </a:prstGeom>
+          <a:solidFill>
+            <a:srgbClr val="FFFFFF"/>
+          </a:solidFill>
+          <a:ln>
+            <a:noFill/>
+          </a:ln>
+          <a:effectLst/>
+        </p:spPr>
+        <p:style>
+          <a:lnRef idx="1">
+            <a:schemeClr val="accent1"/>
+          </a:lnRef>
+          <a:fillRef idx="3">
+            <a:schemeClr val="accent1"/>
+          </a:fillRef>
+          <a:effectRef idx="2">
+            <a:schemeClr val="accent1"/>
+          </a:effectRef>
+          <a:fontRef idx="minor">
+            <a:schemeClr val="lt1"/>
+          </a:fontRef>
+        </p:style>
+        <p:txBody>
+          <a:bodyPr rtlCol="0" anchor="ctr"/>
+          <a:lstStyle/>
+          <a:p/>
+        </p:txBody>
+      </p:sp>
+      <p:sp>
+        <p:nvSpPr>
+          <p:cNvPr id="32" name="TextBox 31"/>
+          <p:cNvSpPr txBox="1"/>
+          <p:nvPr/>
+        </p:nvSpPr>
+        <p:spPr>
+          <a:xfrm>
+            <a:off x="3621024" y="3438144"/>
+            <a:ext cx="4005072" cy="566928"/>
+          </a:xfrm>
+          <a:prstGeom prst="rect">
+            <a:avLst/>
+          </a:prstGeom>
+          <a:noFill/>
+        </p:spPr>
+        <p:txBody>
+          <a:bodyPr wrap="square">
+            <a:spAutoFit/>
+          </a:bodyPr>
+          <a:lstStyle/>
+          <a:p>
+            <a:pPr algn="l">
+              <a:spcAft>
+                <a:spcPts val="400"/>
+              </a:spcAft>
+            </a:pPr>
+            <a:r>
+              <a:rPr sz="950" b="0" i="0">
+                <a:solidFill>
+                  <a:srgbClr val="1A1A1A"/>
+                </a:solidFill>
+                <a:latin typeface="Calibri"/>
+              </a:rPr>
+              <a:t>free, and makes the model a filter not a smoother</a:t>
+            </a:r>
+          </a:p>
+          <a:p>
+            <a:pPr algn="l">
+              <a:spcAft>
+                <a:spcPts val="400"/>
+              </a:spcAft>
+            </a:pPr>
+            <a:r>
+              <a:rPr sz="950" b="0" i="0">
+                <a:solidFill>
+                  <a:srgbClr val="1A1A1A"/>
+                </a:solidFill>
+                <a:latin typeface="Calibri"/>
+              </a:rPr>
+              <a:t>-- required for any DA claim</a:t>
+            </a:r>
+          </a:p>
+        </p:txBody>
+      </p:sp>
+      <p:sp>
+        <p:nvSpPr>
+          <p:cNvPr id="33" name="Rectangle 32"/>
+          <p:cNvSpPr/>
+          <p:nvPr/>
+        </p:nvSpPr>
+        <p:spPr>
+          <a:xfrm>
+            <a:off x="7680960" y="3410712"/>
+            <a:ext cx="4023360" cy="566928"/>
+          </a:xfrm>
+          <a:prstGeom prst="rect">
+            <a:avLst/>
+          </a:prstGeom>
+          <a:solidFill>
+            <a:srgbClr val="FFFFFF"/>
+          </a:solidFill>
+          <a:ln>
+            <a:noFill/>
+          </a:ln>
+          <a:effectLst/>
+        </p:spPr>
+        <p:style>
+          <a:lnRef idx="1">
+            <a:schemeClr val="accent1"/>
+          </a:lnRef>
+          <a:fillRef idx="3">
+            <a:schemeClr val="accent1"/>
+          </a:fillRef>
+          <a:effectRef idx="2">
+            <a:schemeClr val="accent1"/>
+          </a:effectRef>
+          <a:fontRef idx="minor">
+            <a:schemeClr val="lt1"/>
+          </a:fontRef>
+        </p:style>
+        <p:txBody>
+          <a:bodyPr rtlCol="0" anchor="ctr"/>
+          <a:lstStyle/>
+          <a:p/>
+        </p:txBody>
+      </p:sp>
+      <p:sp>
+        <p:nvSpPr>
+          <p:cNvPr id="34" name="TextBox 33"/>
+          <p:cNvSpPr txBox="1"/>
+          <p:nvPr/>
+        </p:nvSpPr>
+        <p:spPr>
+          <a:xfrm>
+            <a:off x="7735824" y="3438144"/>
+            <a:ext cx="3913632" cy="566928"/>
+          </a:xfrm>
+          <a:prstGeom prst="rect">
+            <a:avLst/>
+          </a:prstGeom>
+          <a:noFill/>
+        </p:spPr>
+        <p:txBody>
+          <a:bodyPr wrap="square">
+            <a:spAutoFit/>
+          </a:bodyPr>
+          <a:lstStyle/>
+          <a:p>
+            <a:pPr algn="l">
+              <a:spcAft>
+                <a:spcPts val="400"/>
+              </a:spcAft>
+            </a:pPr>
+            <a:r>
+              <a:rPr sz="950" b="0" i="0">
+                <a:solidFill>
+                  <a:srgbClr val="1A1A1A"/>
+                </a:solidFill>
+                <a:latin typeface="Calibri"/>
+              </a:rPr>
+              <a:t>K=4: 0.837 -&gt; 0.846; large-K decay also reduced</a:t>
+            </a:r>
+          </a:p>
+        </p:txBody>
+      </p:sp>
+      <p:sp>
+        <p:nvSpPr>
+          <p:cNvPr id="35" name="Rectangle 34"/>
+          <p:cNvSpPr/>
+          <p:nvPr/>
+        </p:nvSpPr>
+        <p:spPr>
+          <a:xfrm>
+            <a:off x="457200" y="3977640"/>
+            <a:ext cx="3108960" cy="566928"/>
+          </a:xfrm>
+          <a:prstGeom prst="rect">
+            <a:avLst/>
+          </a:prstGeom>
+          <a:solidFill>
+            <a:srgbClr val="F4F6F8"/>
+          </a:solidFill>
+          <a:ln>
+            <a:noFill/>
+          </a:ln>
+          <a:effectLst/>
+        </p:spPr>
+        <p:style>
+          <a:lnRef idx="1">
+            <a:schemeClr val="accent1"/>
+          </a:lnRef>
+          <a:fillRef idx="3">
+            <a:schemeClr val="accent1"/>
+          </a:fillRef>
+          <a:effectRef idx="2">
+            <a:schemeClr val="accent1"/>
+          </a:effectRef>
+          <a:fontRef idx="minor">
+            <a:schemeClr val="lt1"/>
+          </a:fontRef>
+        </p:style>
+        <p:txBody>
+          <a:bodyPr rtlCol="0" anchor="ctr"/>
+          <a:lstStyle/>
+          <a:p/>
+        </p:txBody>
+      </p:sp>
+      <p:sp>
+        <p:nvSpPr>
+          <p:cNvPr id="36" name="TextBox 35"/>
+          <p:cNvSpPr txBox="1"/>
+          <p:nvPr/>
+        </p:nvSpPr>
+        <p:spPr>
+          <a:xfrm>
+            <a:off x="512064" y="4005072"/>
+            <a:ext cx="2999232" cy="566928"/>
+          </a:xfrm>
+          <a:prstGeom prst="rect">
+            <a:avLst/>
+          </a:prstGeom>
+          <a:noFill/>
+        </p:spPr>
+        <p:txBody>
+          <a:bodyPr wrap="square">
+            <a:spAutoFit/>
+          </a:bodyPr>
+          <a:lstStyle/>
+          <a:p>
+            <a:pPr algn="l">
+              <a:spcAft>
+                <a:spcPts val="400"/>
+              </a:spcAft>
+            </a:pPr>
+            <a:r>
+              <a:rPr sz="950" b="0" i="0">
+                <a:solidFill>
+                  <a:srgbClr val="1A1A1A"/>
+                </a:solidFill>
+                <a:latin typeface="Calibri"/>
+              </a:rPr>
+              <a:t>Geo-encoding on the TIME-ALIGNED path,</a:t>
+            </a:r>
+          </a:p>
+          <a:p>
+            <a:pPr algn="l">
+              <a:spcAft>
+                <a:spcPts val="400"/>
+              </a:spcAft>
+            </a:pPr>
+            <a:r>
+              <a:rPr sz="950" b="0" i="0">
+                <a:solidFill>
+                  <a:srgbClr val="1A1A1A"/>
+                </a:solidFill>
+                <a:latin typeface="Calibri"/>
+              </a:rPr>
+              <a:t>not the connector</a:t>
+            </a:r>
+          </a:p>
+        </p:txBody>
+      </p:sp>
+      <p:sp>
+        <p:nvSpPr>
+          <p:cNvPr id="37" name="Rectangle 36"/>
+          <p:cNvSpPr/>
+          <p:nvPr/>
+        </p:nvSpPr>
+        <p:spPr>
+          <a:xfrm>
+            <a:off x="3566160" y="3977640"/>
+            <a:ext cx="4114800" cy="566928"/>
+          </a:xfrm>
+          <a:prstGeom prst="rect">
+            <a:avLst/>
+          </a:prstGeom>
+          <a:solidFill>
+            <a:srgbClr val="F4F6F8"/>
+          </a:solidFill>
+          <a:ln>
+            <a:noFill/>
+          </a:ln>
+          <a:effectLst/>
+        </p:spPr>
+        <p:style>
+          <a:lnRef idx="1">
+            <a:schemeClr val="accent1"/>
+          </a:lnRef>
+          <a:fillRef idx="3">
+            <a:schemeClr val="accent1"/>
+          </a:fillRef>
+          <a:effectRef idx="2">
+            <a:schemeClr val="accent1"/>
+          </a:effectRef>
+          <a:fontRef idx="minor">
+            <a:schemeClr val="lt1"/>
+          </a:fontRef>
+        </p:style>
+        <p:txBody>
+          <a:bodyPr rtlCol="0" anchor="ctr"/>
+          <a:lstStyle/>
+          <a:p/>
+        </p:txBody>
+      </p:sp>
+      <p:sp>
+        <p:nvSpPr>
+          <p:cNvPr id="38" name="TextBox 37"/>
+          <p:cNvSpPr txBox="1"/>
+          <p:nvPr/>
+        </p:nvSpPr>
+        <p:spPr>
+          <a:xfrm>
+            <a:off x="3621024" y="4005072"/>
+            <a:ext cx="4005072" cy="566928"/>
+          </a:xfrm>
+          <a:prstGeom prst="rect">
+            <a:avLst/>
+          </a:prstGeom>
+          <a:noFill/>
+        </p:spPr>
+        <p:txBody>
+          <a:bodyPr wrap="square">
+            <a:spAutoFit/>
+          </a:bodyPr>
+          <a:lstStyle/>
+          <a:p>
+            <a:pPr algn="l">
+              <a:spcAft>
+                <a:spcPts val="400"/>
+              </a:spcAft>
+            </a:pPr>
+            <a:r>
+              <a:rPr sz="950" b="0" i="0">
+                <a:solidFill>
+                  <a:srgbClr val="1A1A1A"/>
+                </a:solidFill>
+                <a:latin typeface="Calibri"/>
+              </a:rPr>
+              <a:t>the connector carries almost no signal; context</a:t>
+            </a:r>
+          </a:p>
+          <a:p>
+            <a:pPr algn="l">
+              <a:spcAft>
+                <a:spcPts val="400"/>
+              </a:spcAft>
+            </a:pPr>
+            <a:r>
+              <a:rPr sz="950" b="0" i="0">
+                <a:solidFill>
+                  <a:srgbClr val="1A1A1A"/>
+                </a:solidFill>
+                <a:latin typeface="Calibri"/>
+              </a:rPr>
+              <a:t>is actually mixed in tcross</a:t>
+            </a:r>
+          </a:p>
+        </p:txBody>
+      </p:sp>
+      <p:sp>
+        <p:nvSpPr>
+          <p:cNvPr id="39" name="Rectangle 38"/>
+          <p:cNvSpPr/>
+          <p:nvPr/>
+        </p:nvSpPr>
+        <p:spPr>
+          <a:xfrm>
+            <a:off x="7680960" y="3977640"/>
+            <a:ext cx="4023360" cy="566928"/>
+          </a:xfrm>
+          <a:prstGeom prst="rect">
+            <a:avLst/>
+          </a:prstGeom>
+          <a:solidFill>
+            <a:srgbClr val="F4F6F8"/>
+          </a:solidFill>
+          <a:ln>
+            <a:noFill/>
+          </a:ln>
+          <a:effectLst/>
+        </p:spPr>
+        <p:style>
+          <a:lnRef idx="1">
+            <a:schemeClr val="accent1"/>
+          </a:lnRef>
+          <a:fillRef idx="3">
+            <a:schemeClr val="accent1"/>
+          </a:fillRef>
+          <a:effectRef idx="2">
+            <a:schemeClr val="accent1"/>
+          </a:effectRef>
+          <a:fontRef idx="minor">
+            <a:schemeClr val="lt1"/>
+          </a:fontRef>
+        </p:style>
+        <p:txBody>
+          <a:bodyPr rtlCol="0" anchor="ctr"/>
+          <a:lstStyle/>
+          <a:p/>
+        </p:txBody>
+      </p:sp>
+      <p:sp>
+        <p:nvSpPr>
+          <p:cNvPr id="40" name="TextBox 39"/>
+          <p:cNvSpPr txBox="1"/>
+          <p:nvPr/>
+        </p:nvSpPr>
+        <p:spPr>
+          <a:xfrm>
+            <a:off x="7735824" y="4005072"/>
+            <a:ext cx="3913632" cy="566928"/>
+          </a:xfrm>
+          <a:prstGeom prst="rect">
+            <a:avLst/>
+          </a:prstGeom>
+          <a:noFill/>
+        </p:spPr>
+        <p:txBody>
+          <a:bodyPr wrap="square">
+            <a:spAutoFit/>
+          </a:bodyPr>
+          <a:lstStyle/>
+          <a:p>
+            <a:pPr algn="l">
+              <a:spcAft>
+                <a:spcPts val="400"/>
+              </a:spcAft>
+            </a:pPr>
+            <a:r>
+              <a:rPr sz="950" b="0" i="0">
+                <a:solidFill>
+                  <a:srgbClr val="1A1A1A"/>
+                </a:solidFill>
+                <a:latin typeface="Calibri"/>
+              </a:rPr>
+              <a:t>connector contributes 0.001. Moved: K=32 goes</a:t>
+            </a:r>
+          </a:p>
+          <a:p>
+            <a:pPr algn="l">
+              <a:spcAft>
+                <a:spcPts val="400"/>
+              </a:spcAft>
+            </a:pPr>
+            <a:r>
+              <a:rPr sz="950" b="0" i="0">
+                <a:solidFill>
+                  <a:srgbClr val="1A1A1A"/>
+                </a:solidFill>
+                <a:latin typeface="Calibri"/>
+              </a:rPr>
+              <a:t>0.828 -&gt; 0.846, flat from K=4 onward</a:t>
+            </a:r>
+          </a:p>
+        </p:txBody>
+      </p:sp>
+      <p:sp>
+        <p:nvSpPr>
+          <p:cNvPr id="41" name="Rectangle 40"/>
+          <p:cNvSpPr/>
+          <p:nvPr/>
+        </p:nvSpPr>
+        <p:spPr>
+          <a:xfrm>
+            <a:off x="457200" y="4544568"/>
+            <a:ext cx="3108960" cy="566928"/>
+          </a:xfrm>
+          <a:prstGeom prst="rect">
+            <a:avLst/>
+          </a:prstGeom>
+          <a:solidFill>
+            <a:srgbClr val="FFFFFF"/>
+          </a:solidFill>
+          <a:ln>
+            <a:noFill/>
+          </a:ln>
+          <a:effectLst/>
+        </p:spPr>
+        <p:style>
+          <a:lnRef idx="1">
+            <a:schemeClr val="accent1"/>
+          </a:lnRef>
+          <a:fillRef idx="3">
+            <a:schemeClr val="accent1"/>
+          </a:fillRef>
+          <a:effectRef idx="2">
+            <a:schemeClr val="accent1"/>
+          </a:effectRef>
+          <a:fontRef idx="minor">
+            <a:schemeClr val="lt1"/>
+          </a:fontRef>
+        </p:style>
+        <p:txBody>
+          <a:bodyPr rtlCol="0" anchor="ctr"/>
+          <a:lstStyle/>
+          <a:p/>
+        </p:txBody>
+      </p:sp>
+      <p:sp>
+        <p:nvSpPr>
+          <p:cNvPr id="42" name="TextBox 41"/>
+          <p:cNvSpPr txBox="1"/>
+          <p:nvPr/>
+        </p:nvSpPr>
+        <p:spPr>
+          <a:xfrm>
+            <a:off x="512064" y="4572000"/>
+            <a:ext cx="2999232" cy="566928"/>
+          </a:xfrm>
+          <a:prstGeom prst="rect">
+            <a:avLst/>
+          </a:prstGeom>
+          <a:noFill/>
+        </p:spPr>
+        <p:txBody>
+          <a:bodyPr wrap="square">
+            <a:spAutoFit/>
+          </a:bodyPr>
+          <a:lstStyle/>
+          <a:p>
+            <a:pPr algn="l">
+              <a:spcAft>
+                <a:spcPts val="400"/>
+              </a:spcAft>
+            </a:pPr>
+            <a:r>
+              <a:rPr sz="950" b="0" i="0">
+                <a:solidFill>
+                  <a:srgbClr val="1A1A1A"/>
+                </a:solidFill>
+                <a:latin typeface="Calibri"/>
+              </a:rPr>
+              <a:t>Prefer DEM over curated statics</a:t>
+            </a:r>
+          </a:p>
+          <a:p>
+            <a:pPr algn="l">
+              <a:spcAft>
+                <a:spcPts val="400"/>
+              </a:spcAft>
+            </a:pPr>
+            <a:r>
+              <a:rPr sz="950" b="0" i="0">
+                <a:solidFill>
+                  <a:srgbClr val="1A1A1A"/>
+                </a:solidFill>
+                <a:latin typeface="Calibri"/>
+              </a:rPr>
+              <a:t>(NOT YET IMPLEMENTED)</a:t>
+            </a:r>
+          </a:p>
+        </p:txBody>
+      </p:sp>
+      <p:sp>
+        <p:nvSpPr>
+          <p:cNvPr id="43" name="Rectangle 42"/>
+          <p:cNvSpPr/>
+          <p:nvPr/>
+        </p:nvSpPr>
+        <p:spPr>
+          <a:xfrm>
+            <a:off x="3566160" y="4544568"/>
+            <a:ext cx="4114800" cy="566928"/>
+          </a:xfrm>
+          <a:prstGeom prst="rect">
+            <a:avLst/>
+          </a:prstGeom>
+          <a:solidFill>
+            <a:srgbClr val="FFFFFF"/>
+          </a:solidFill>
+          <a:ln>
+            <a:noFill/>
+          </a:ln>
+          <a:effectLst/>
+        </p:spPr>
+        <p:style>
+          <a:lnRef idx="1">
+            <a:schemeClr val="accent1"/>
+          </a:lnRef>
+          <a:fillRef idx="3">
+            <a:schemeClr val="accent1"/>
+          </a:fillRef>
+          <a:effectRef idx="2">
+            <a:schemeClr val="accent1"/>
+          </a:effectRef>
+          <a:fontRef idx="minor">
+            <a:schemeClr val="lt1"/>
+          </a:fontRef>
+        </p:style>
+        <p:txBody>
+          <a:bodyPr rtlCol="0" anchor="ctr"/>
+          <a:lstStyle/>
+          <a:p/>
+        </p:txBody>
+      </p:sp>
+      <p:sp>
+        <p:nvSpPr>
+          <p:cNvPr id="44" name="TextBox 43"/>
+          <p:cNvSpPr txBox="1"/>
+          <p:nvPr/>
+        </p:nvSpPr>
+        <p:spPr>
+          <a:xfrm>
+            <a:off x="3621024" y="4572000"/>
+            <a:ext cx="4005072" cy="566928"/>
+          </a:xfrm>
+          <a:prstGeom prst="rect">
+            <a:avLst/>
+          </a:prstGeom>
+          <a:noFill/>
+        </p:spPr>
+        <p:txBody>
+          <a:bodyPr wrap="square">
+            <a:spAutoFit/>
+          </a:bodyPr>
+          <a:lstStyle/>
+          <a:p>
+            <a:pPr algn="l">
+              <a:spcAft>
+                <a:spcPts val="400"/>
+              </a:spcAft>
+            </a:pPr>
+            <a:r>
+              <a:rPr sz="950" b="0" i="0">
+                <a:solidFill>
+                  <a:srgbClr val="1A1A1A"/>
+                </a:solidFill>
+                <a:latin typeface="Calibri"/>
+              </a:rPr>
+              <a:t>curated attributes win in-distribution and fail</a:t>
+            </a:r>
+          </a:p>
+          <a:p>
+            <a:pPr algn="l">
+              <a:spcAft>
+                <a:spcPts val="400"/>
+              </a:spcAft>
+            </a:pPr>
+            <a:r>
+              <a:rPr sz="950" b="0" i="0">
+                <a:solidFill>
+                  <a:srgbClr val="1A1A1A"/>
+                </a:solidFill>
+                <a:latin typeface="Calibri"/>
+              </a:rPr>
+              <a:t>globally; DEM is the consistent input</a:t>
+            </a:r>
+          </a:p>
+        </p:txBody>
+      </p:sp>
+      <p:sp>
+        <p:nvSpPr>
+          <p:cNvPr id="45" name="Rectangle 44"/>
+          <p:cNvSpPr/>
+          <p:nvPr/>
+        </p:nvSpPr>
+        <p:spPr>
+          <a:xfrm>
+            <a:off x="7680960" y="4544568"/>
+            <a:ext cx="4023360" cy="566928"/>
+          </a:xfrm>
+          <a:prstGeom prst="rect">
+            <a:avLst/>
+          </a:prstGeom>
+          <a:solidFill>
+            <a:srgbClr val="FFFFFF"/>
+          </a:solidFill>
+          <a:ln>
+            <a:noFill/>
+          </a:ln>
+          <a:effectLst/>
+        </p:spPr>
+        <p:style>
+          <a:lnRef idx="1">
+            <a:schemeClr val="accent1"/>
+          </a:lnRef>
+          <a:fillRef idx="3">
+            <a:schemeClr val="accent1"/>
+          </a:fillRef>
+          <a:effectRef idx="2">
+            <a:schemeClr val="accent1"/>
+          </a:effectRef>
+          <a:fontRef idx="minor">
+            <a:schemeClr val="lt1"/>
+          </a:fontRef>
+        </p:style>
+        <p:txBody>
+          <a:bodyPr rtlCol="0" anchor="ctr"/>
+          <a:lstStyle/>
+          <a:p/>
+        </p:txBody>
+      </p:sp>
+      <p:sp>
+        <p:nvSpPr>
+          <p:cNvPr id="46" name="TextBox 45"/>
+          <p:cNvSpPr txBox="1"/>
+          <p:nvPr/>
+        </p:nvSpPr>
+        <p:spPr>
+          <a:xfrm>
+            <a:off x="7735824" y="4572000"/>
+            <a:ext cx="3913632" cy="566928"/>
+          </a:xfrm>
+          <a:prstGeom prst="rect">
+            <a:avLst/>
+          </a:prstGeom>
+          <a:noFill/>
+        </p:spPr>
+        <p:txBody>
+          <a:bodyPr wrap="square">
+            <a:spAutoFit/>
+          </a:bodyPr>
+          <a:lstStyle/>
+          <a:p>
+            <a:pPr algn="l">
+              <a:spcAft>
+                <a:spcPts val="400"/>
+              </a:spcAft>
+            </a:pPr>
+            <a:r>
+              <a:rPr sz="950" b="0" i="0">
+                <a:solidFill>
+                  <a:srgbClr val="1A1A1A"/>
+                </a:solidFill>
+                <a:latin typeface="Calibri"/>
+              </a:rPr>
+              <a:t>untested. Ablating statics at inference would</a:t>
+            </a:r>
+          </a:p>
+          <a:p>
+            <a:pPr algn="l">
+              <a:spcAft>
+                <a:spcPts val="400"/>
+              </a:spcAft>
+            </a:pPr>
+            <a:r>
+              <a:rPr sz="950" b="0" i="0">
+                <a:solidFill>
+                  <a:srgbClr val="1A1A1A"/>
+                </a:solidFill>
+                <a:latin typeface="Calibri"/>
+              </a:rPr>
+              <a:t>measure the transfer risk directly</a:t>
+            </a:r>
+          </a:p>
+        </p:txBody>
+      </p:sp>
+      <p:sp>
+        <p:nvSpPr>
+          <p:cNvPr id="47" name="Rounded Rectangle 46"/>
+          <p:cNvSpPr/>
+          <p:nvPr/>
+        </p:nvSpPr>
+        <p:spPr>
+          <a:xfrm>
+            <a:off x="457200" y="5029200"/>
+            <a:ext cx="11247120" cy="914400"/>
+          </a:xfrm>
+          <a:prstGeom prst="roundRect">
+            <a:avLst/>
+          </a:prstGeom>
+          <a:solidFill>
+            <a:srgbClr val="F4F6F8"/>
+          </a:solidFill>
+          <a:ln w="15875">
+            <a:solidFill>
+              <a:srgbClr val="0B5F8A"/>
+            </a:solidFill>
+          </a:ln>
+          <a:effectLst/>
+        </p:spPr>
+        <p:style>
+          <a:lnRef idx="1">
+            <a:schemeClr val="accent1"/>
+          </a:lnRef>
+          <a:fillRef idx="3">
+            <a:schemeClr val="accent1"/>
+          </a:fillRef>
+          <a:effectRef idx="2">
+            <a:schemeClr val="accent1"/>
+          </a:effectRef>
+          <a:fontRef idx="minor">
+            <a:schemeClr val="lt1"/>
+          </a:fontRef>
+        </p:style>
+        <p:txBody>
+          <a:bodyPr rtlCol="0" anchor="ctr"/>
+          <a:lstStyle/>
+          <a:p/>
+        </p:txBody>
+      </p:sp>
+      <p:sp>
+        <p:nvSpPr>
+          <p:cNvPr id="48" name="TextBox 47"/>
+          <p:cNvSpPr txBox="1"/>
+          <p:nvPr/>
+        </p:nvSpPr>
+        <p:spPr>
+          <a:xfrm>
+            <a:off x="640080" y="5138928"/>
+            <a:ext cx="10881360" cy="777240"/>
+          </a:xfrm>
+          <a:prstGeom prst="rect">
+            <a:avLst/>
+          </a:prstGeom>
+          <a:noFill/>
+        </p:spPr>
+        <p:txBody>
+          <a:bodyPr wrap="square">
+            <a:spAutoFit/>
+          </a:bodyPr>
+          <a:lstStyle/>
+          <a:p>
+            <a:pPr algn="l">
+              <a:spcAft>
+                <a:spcPts val="400"/>
+              </a:spcAft>
+            </a:pPr>
+            <a:r>
+              <a:rPr sz="1250" b="0" i="0">
+                <a:solidFill>
+                  <a:srgbClr val="1A1A1A"/>
+                </a:solidFill>
+                <a:latin typeface="Calibri"/>
+              </a:rPr>
+              <a:t>One pattern behind all six: a capability the model is never asked for during pretraining does not exist at inference,</a:t>
+            </a:r>
+          </a:p>
+          <a:p>
+            <a:pPr algn="l">
+              <a:spcAft>
+                <a:spcPts val="400"/>
+              </a:spcAft>
+            </a:pPr>
+            <a:r>
+              <a:rPr sz="1250" b="0" i="0">
+                <a:solidFill>
+                  <a:srgbClr val="1A1A1A"/>
+                </a:solidFill>
+                <a:latin typeface="Calibri"/>
+              </a:rPr>
+              <a:t>and one it is only occasionally asked for exists weakly. Scale (671 -&gt; ~40,000 stations) changes the budget, not this rule.</a:t>
+            </a:r>
+          </a:p>
+        </p:txBody>
+      </p:sp>
+    </p:spTree>
+  </p:cSld>
+  <p:clrMapOvr>
+    <a:masterClrMapping/>
+  </p:clrMapOvr>
+</p:sld>
+</file>
+
 <file path=ppt/slides/slide2.xml><?xml version="1.0" encoding="utf-8"?>
 <p:sld xmlns:a="http://schemas.openxmlformats.org/drawingml/2006/main" xmlns:p="http://schemas.openxmlformats.org/presentationml/2006/main" xmlns:r="http://schemas.openxmlformats.org/officeDocument/2006/relationships">
   <p:cSld>
@@ -20927,7 +23122,7 @@
                 </a:solidFill>
                 <a:latin typeface="Calibri"/>
               </a:rPr>
-              <a:t>1</a:t>
+              <a:t>1..a</a:t>
             </a:r>
           </a:p>
         </p:txBody>
@@ -21089,7 +23284,7 @@
                 </a:solidFill>
                 <a:latin typeface="Calibri"/>
               </a:rPr>
-              <a:t>MLP(18 attributes)</a:t>
+              <a:t>ONE TOKEN PER ATTRIBUTE: attr-ID emb + value</a:t>
             </a:r>
           </a:p>
         </p:txBody>
@@ -22304,7 +24499,7 @@
                 </a:solidFill>
                 <a:latin typeface="Calibri"/>
               </a:rPr>
-              <a:t>MLP(18 attributes)</a:t>
+              <a:t>one token per attribute, same ID space</a:t>
             </a:r>
           </a:p>
         </p:txBody>
